--- a/slides/cosplay_reserve_final.pptx
+++ b/slides/cosplay_reserve_final.pptx
@@ -5543,7 +5543,7 @@
                 </a:solidFill>
                 <a:latin typeface="Meiryo"/>
               </a:rPr>
-              <a:t>API 不使用で再現できる範囲: M1 全体 ／ 感度分析 replay ／ 主結果の再判定 ／ テスト 202 件。</a:t>
+              <a:t>API 不使用で再現できる範囲: M1 全体 ／ 感度分析 replay ／ 主結果の再判定 ／ テスト 216 件。</a:t>
             </a:r>
           </a:p>
           <a:p>
@@ -9583,7 +9583,7 @@
                 </a:solidFill>
                 <a:latin typeface="Consolas"/>
               </a:rPr>
-              <a:t>202 tests  /  preregistered adjudication  /  API-free replay</a:t>
+              <a:t>216 tests  /  preregistered adjudication  /  API-free replay</a:t>
             </a:r>
           </a:p>
         </p:txBody>
